--- a/assets/ppts/M1.4_WWW_and_HTTP.pptx
+++ b/assets/ppts/M1.4_WWW_and_HTTP.pptx
@@ -9,6 +9,7 @@
     <p:sldId id="257" r:id="rId8"/>
     <p:sldId id="258" r:id="rId9"/>
     <p:sldId id="259" r:id="rId10"/>
+    <p:sldId id="260" r:id="rId11"/>
   </p:sldIdLst>
   <p:sldSz cx="12191695" cy="6858000" type="screen4x3"/>
   <p:notesSz cx="6858000" cy="9144000"/>
@@ -3142,8 +3143,8 @@
         </p:nvSpPr>
         <p:spPr>
           <a:xfrm>
-            <a:off x="822960" y="1188720"/>
-            <a:ext cx="164592" cy="4480560"/>
+            <a:off x="0" y="0"/>
+            <a:ext cx="12191695" cy="137160"/>
           </a:xfrm>
           <a:prstGeom prst="rect">
             <a:avLst/>
@@ -3179,14 +3180,57 @@
       </p:sp>
       <p:sp>
         <p:nvSpPr>
-          <p:cNvPr id="4" name="TextBox 3"/>
+          <p:cNvPr id="4" name="Rectangle 3"/>
+          <p:cNvSpPr/>
+          <p:nvPr/>
+        </p:nvSpPr>
+        <p:spPr>
+          <a:xfrm>
+            <a:off x="822960" y="1097280"/>
+            <a:ext cx="164592" cy="4663440"/>
+          </a:xfrm>
+          <a:prstGeom prst="rect">
+            <a:avLst/>
+          </a:prstGeom>
+          <a:solidFill>
+            <a:srgbClr val="D97706"/>
+          </a:solidFill>
+          <a:ln>
+            <a:noFill/>
+          </a:ln>
+        </p:spPr>
+        <p:style>
+          <a:lnRef idx="1">
+            <a:schemeClr val="accent1"/>
+          </a:lnRef>
+          <a:fillRef idx="3">
+            <a:schemeClr val="accent1"/>
+          </a:fillRef>
+          <a:effectRef idx="2">
+            <a:schemeClr val="accent1"/>
+          </a:effectRef>
+          <a:fontRef idx="minor">
+            <a:schemeClr val="lt1"/>
+          </a:fontRef>
+        </p:style>
+        <p:txBody>
+          <a:bodyPr rtlCol="0" anchor="ctr"/>
+          <a:lstStyle/>
+          <a:p>
+            <a:pPr algn="ctr"/>
+          </a:p>
+        </p:txBody>
+      </p:sp>
+      <p:sp>
+        <p:nvSpPr>
+          <p:cNvPr id="5" name="TextBox 4"/>
           <p:cNvSpPr txBox="1"/>
           <p:nvPr/>
         </p:nvSpPr>
         <p:spPr>
           <a:xfrm>
-            <a:off x="1280160" y="1097280"/>
-            <a:ext cx="10058400" cy="4663440"/>
+            <a:off x="1234440" y="1005840"/>
+            <a:ext cx="10241280" cy="4846320"/>
           </a:xfrm>
           <a:prstGeom prst="rect">
             <a:avLst/>
@@ -3201,70 +3245,165 @@
           <a:p>
             <a:pPr>
               <a:spcAft>
+                <a:spcPts val="1000"/>
+              </a:spcAft>
+              <a:defRPr b="1" sz="1300">
+                <a:solidFill>
+                  <a:srgbClr val="D97706"/>
+                </a:solidFill>
+              </a:defRPr>
+            </a:pPr>
+            <a:r>
+              <a:t>PCCST501 Computer Networks | KTU 2024 Scheme • MODULE 1 • M1.4</a:t>
+            </a:r>
+          </a:p>
+          <a:p>
+            <a:pPr>
+              <a:spcAft>
                 <a:spcPts val="1200"/>
               </a:spcAft>
-              <a:defRPr b="1" sz="1300">
+              <a:defRPr b="1" sz="3000">
+                <a:solidFill>
+                  <a:srgbClr val="F8FAFC"/>
+                </a:solidFill>
+              </a:defRPr>
+            </a:pPr>
+            <a:r>
+              <a:t>World Wide Web &amp; HTTP Protocol Suite</a:t>
+            </a:r>
+          </a:p>
+          <a:p>
+            <a:pPr>
+              <a:spcAft>
+                <a:spcPts val="2400"/>
+              </a:spcAft>
+              <a:defRPr sz="1600">
+                <a:solidFill>
+                  <a:srgbClr val="94A3B8"/>
+                </a:solidFill>
+              </a:defRPr>
+            </a:pPr>
+            <a:r>
+              <a:t>HTTP/1.0, HTTP/1.1 (Persistent vs Non-Persistent, Pipelining), HTTP/2 (Binary Framing, Streams, Push), HTTP/3 (QUIC), Caching &amp; Cookies</a:t>
+            </a:r>
+          </a:p>
+          <a:p>
+            <a:pPr>
+              <a:spcAft>
+                <a:spcPts val="300"/>
+              </a:spcAft>
+              <a:defRPr b="1" sz="1350">
+                <a:solidFill>
+                  <a:srgbClr val="E2E8F0"/>
+                </a:solidFill>
+              </a:defRPr>
+            </a:pPr>
+            <a:r>
+              <a:t>Prepared by: Prof. Anju Markose | Assistant Professor, Dept. of CSE | VJCET</a:t>
+            </a:r>
+          </a:p>
+          <a:p>
+            <a:pPr>
+              <a:defRPr sz="1150">
+                <a:solidFill>
+                  <a:srgbClr val="94A3B8"/>
+                </a:solidFill>
+              </a:defRPr>
+            </a:pPr>
+            <a:r>
+              <a:t>Viswajyothi College of Engineering and Technology (VJCET), Vazhakulam • KTU S5 CSE</a:t>
+            </a:r>
+          </a:p>
+        </p:txBody>
+      </p:sp>
+      <p:sp>
+        <p:nvSpPr>
+          <p:cNvPr id="6" name="Rounded Rectangle 5"/>
+          <p:cNvSpPr/>
+          <p:nvPr/>
+        </p:nvSpPr>
+        <p:spPr>
+          <a:xfrm>
+            <a:off x="8412480" y="5120640"/>
+            <a:ext cx="3017520" cy="822960"/>
+          </a:xfrm>
+          <a:prstGeom prst="roundRect">
+            <a:avLst/>
+          </a:prstGeom>
+          <a:solidFill>
+            <a:srgbClr val="1E293B"/>
+          </a:solidFill>
+          <a:ln w="12700">
+            <a:solidFill>
+              <a:srgbClr val="0E7490"/>
+            </a:solidFill>
+          </a:ln>
+        </p:spPr>
+        <p:style>
+          <a:lnRef idx="1">
+            <a:schemeClr val="accent1"/>
+          </a:lnRef>
+          <a:fillRef idx="3">
+            <a:schemeClr val="accent1"/>
+          </a:fillRef>
+          <a:effectRef idx="2">
+            <a:schemeClr val="accent1"/>
+          </a:effectRef>
+          <a:fontRef idx="minor">
+            <a:schemeClr val="lt1"/>
+          </a:fontRef>
+        </p:style>
+        <p:txBody>
+          <a:bodyPr rtlCol="0" anchor="ctr"/>
+          <a:lstStyle/>
+          <a:p>
+            <a:pPr algn="ctr"/>
+          </a:p>
+        </p:txBody>
+      </p:sp>
+      <p:sp>
+        <p:nvSpPr>
+          <p:cNvPr id="7" name="TextBox 6"/>
+          <p:cNvSpPr txBox="1"/>
+          <p:nvPr/>
+        </p:nvSpPr>
+        <p:spPr>
+          <a:xfrm>
+            <a:off x="8503920" y="5166360"/>
+            <a:ext cx="2834640" cy="731520"/>
+          </a:xfrm>
+          <a:prstGeom prst="rect">
+            <a:avLst/>
+          </a:prstGeom>
+          <a:noFill/>
+        </p:spPr>
+        <p:txBody>
+          <a:bodyPr wrap="none">
+            <a:spAutoFit/>
+          </a:bodyPr>
+          <a:lstStyle/>
+          <a:p>
+            <a:pPr>
+              <a:defRPr b="1" sz="1050">
                 <a:solidFill>
                   <a:srgbClr val="D97706"/>
                 </a:solidFill>
               </a:defRPr>
             </a:pPr>
             <a:r>
-              <a:t>PCCST501 Computer Networks | KTU 2024 Scheme • MODULE 1 • M1.4</a:t>
-            </a:r>
-          </a:p>
-          <a:p>
-            <a:pPr>
-              <a:spcAft>
-                <a:spcPts val="1400"/>
-              </a:spcAft>
-              <a:defRPr b="1" sz="3200">
+              <a:t>KTU B.Tech Curriculum</a:t>
+            </a:r>
+          </a:p>
+          <a:p>
+            <a:pPr>
+              <a:defRPr sz="950">
                 <a:solidFill>
                   <a:srgbClr val="F8FAFC"/>
                 </a:solidFill>
               </a:defRPr>
             </a:pPr>
             <a:r>
-              <a:t>World Wide Web &amp; HTTP Architecture</a:t>
-            </a:r>
-          </a:p>
-          <a:p>
-            <a:pPr>
-              <a:spcAft>
-                <a:spcPts val="2800"/>
-              </a:spcAft>
-              <a:defRPr sz="1700">
-                <a:solidFill>
-                  <a:srgbClr val="94A3B8"/>
-                </a:solidFill>
-              </a:defRPr>
-            </a:pPr>
-            <a:r>
-              <a:t>HTTP/1.0, HTTP/1.1 Persistent Pipelining, HTTP/2 Binary Multiplexing, HTTP/3, Methods, Status Codes &amp; Caching</a:t>
-            </a:r>
-          </a:p>
-          <a:p>
-            <a:pPr>
-              <a:defRPr b="1" sz="1300">
-                <a:solidFill>
-                  <a:srgbClr val="E2E8F0"/>
-                </a:solidFill>
-              </a:defRPr>
-            </a:pPr>
-            <a:r>
-              <a:t>Prepared by: Prof. Anju Markose | Assistant Professor, Dept. of CSE | VJCET</a:t>
-            </a:r>
-          </a:p>
-          <a:p>
-            <a:pPr>
-              <a:defRPr sz="1100">
-                <a:solidFill>
-                  <a:srgbClr val="94A3B8"/>
-                </a:solidFill>
-              </a:defRPr>
-            </a:pPr>
-            <a:r>
-              <a:t>Viswajyothi College of Engineering and Technology (VJCET), Vazhakulam</a:t>
+              <a:t>Official Classroom Slide Deck</a:t>
             </a:r>
           </a:p>
         </p:txBody>
@@ -3396,14 +3535,14 @@
           <a:lstStyle/>
           <a:p>
             <a:pPr>
-              <a:defRPr b="1" sz="2300">
+              <a:defRPr b="1" sz="2200">
                 <a:solidFill>
                   <a:srgbClr val="F8FAFC"/>
                 </a:solidFill>
               </a:defRPr>
             </a:pPr>
             <a:r>
-              <a:t>1.4.1 HTTP Protocol Fundamentals</a:t>
+              <a:t>1.4.1 HTTP Protocol Fundamentals &amp; Message Structure</a:t>
             </a:r>
           </a:p>
         </p:txBody>
@@ -3451,7 +3590,7 @@
         </p:nvSpPr>
         <p:spPr>
           <a:xfrm>
-            <a:off x="731520" y="1280160"/>
+            <a:off x="731520" y="1234440"/>
             <a:ext cx="6858000" cy="4937760"/>
           </a:xfrm>
           <a:prstGeom prst="rect">
@@ -3469,29 +3608,29 @@
               <a:spcAft>
                 <a:spcPts val="200"/>
               </a:spcAft>
-              <a:defRPr b="1" sz="1500">
+              <a:defRPr b="1" sz="1450">
                 <a:solidFill>
                   <a:srgbClr val="0F1E4A"/>
                 </a:solidFill>
               </a:defRPr>
             </a:pPr>
             <a:r>
-              <a:t>• HyperText Transfer Protocol (HTTP)</a:t>
+              <a:t>• HTTP (HyperText Transfer Protocol)</a:t>
             </a:r>
           </a:p>
           <a:p>
             <a:pPr>
               <a:spcAft>
-                <a:spcPts val="800"/>
+                <a:spcPts val="700"/>
               </a:spcAft>
-              <a:defRPr sz="1300">
-                <a:solidFill>
-                  <a:srgbClr val="1E293B"/>
-                </a:solidFill>
-              </a:defRPr>
-            </a:pPr>
-            <a:r>
-              <a:t>   Application-layer request-response protocol running over TCP (Port 80 HTTP, Port 443 HTTPS).</a:t>
+              <a:defRPr sz="1250">
+                <a:solidFill>
+                  <a:srgbClr val="0F172A"/>
+                </a:solidFill>
+              </a:defRPr>
+            </a:pPr>
+            <a:r>
+              <a:t>   Stateless, application-layer request-response protocol operating over TCP (standard port 80, TLS encrypted HTTPS port 443).</a:t>
             </a:r>
           </a:p>
           <a:p>
@@ -3499,29 +3638,29 @@
               <a:spcAft>
                 <a:spcPts val="200"/>
               </a:spcAft>
-              <a:defRPr b="1" sz="1500">
+              <a:defRPr b="1" sz="1450">
                 <a:solidFill>
                   <a:srgbClr val="0F1E4A"/>
                 </a:solidFill>
               </a:defRPr>
             </a:pPr>
             <a:r>
-              <a:t>• Stateless Nature</a:t>
+              <a:t>• HTTP Request Structure</a:t>
             </a:r>
           </a:p>
           <a:p>
             <a:pPr>
               <a:spcAft>
-                <a:spcPts val="800"/>
+                <a:spcPts val="700"/>
               </a:spcAft>
-              <a:defRPr sz="1300">
-                <a:solidFill>
-                  <a:srgbClr val="1E293B"/>
-                </a:solidFill>
-              </a:defRPr>
-            </a:pPr>
-            <a:r>
-              <a:t>   Server maintains no information about past client requests. Cookies and sessions add state on top of HTTP.</a:t>
+              <a:defRPr sz="1250">
+                <a:solidFill>
+                  <a:srgbClr val="0F172A"/>
+                </a:solidFill>
+              </a:defRPr>
+            </a:pPr>
+            <a:r>
+              <a:t>   Method (GET, POST, HEAD, PUT, DELETE) + Request-URI + HTTP-Version \r\n Header Lines (Host, User-Agent, Accept, Cookie) \r\n\r\n [Optional Entity Body].</a:t>
             </a:r>
           </a:p>
           <a:p>
@@ -3529,29 +3668,29 @@
               <a:spcAft>
                 <a:spcPts val="200"/>
               </a:spcAft>
-              <a:defRPr b="1" sz="1500">
+              <a:defRPr b="1" sz="1450">
                 <a:solidFill>
                   <a:srgbClr val="0F1E4A"/>
                 </a:solidFill>
               </a:defRPr>
             </a:pPr>
             <a:r>
-              <a:t>• HTTP Request Message</a:t>
+              <a:t>• HTTP Response Structure</a:t>
             </a:r>
           </a:p>
           <a:p>
             <a:pPr>
               <a:spcAft>
-                <a:spcPts val="800"/>
+                <a:spcPts val="700"/>
               </a:spcAft>
-              <a:defRPr sz="1300">
-                <a:solidFill>
-                  <a:srgbClr val="1E293B"/>
-                </a:solidFill>
-              </a:defRPr>
-            </a:pPr>
-            <a:r>
-              <a:t>   Consists of Request Line (`METHOD URL VERSION`), Header Lines (`Host:`, `User-Agent:`, `Accept:`), Blank Line (`\r\n`), and Entity Body (in POST).</a:t>
+              <a:defRPr sz="1250">
+                <a:solidFill>
+                  <a:srgbClr val="0F172A"/>
+                </a:solidFill>
+              </a:defRPr>
+            </a:pPr>
+            <a:r>
+              <a:t>   HTTP-Version + Status Code (200 OK, 301 Moved, 304 Not Modified, 404 Not Found, 500 Server Error) + Status Phrase \r\n Headers (Content-Type, Content-Length, Set-Cookie, Cache-Control) \r\n\r\n [Data Body].</a:t>
             </a:r>
           </a:p>
           <a:p>
@@ -3559,29 +3698,29 @@
               <a:spcAft>
                 <a:spcPts val="200"/>
               </a:spcAft>
-              <a:defRPr b="1" sz="1500">
+              <a:defRPr b="1" sz="1450">
                 <a:solidFill>
                   <a:srgbClr val="0F1E4A"/>
                 </a:solidFill>
               </a:defRPr>
             </a:pPr>
             <a:r>
-              <a:t>• HTTP Response Message</a:t>
+              <a:t>• Statelessness &amp; State Management</a:t>
             </a:r>
           </a:p>
           <a:p>
             <a:pPr>
               <a:spcAft>
-                <a:spcPts val="800"/>
+                <a:spcPts val="700"/>
               </a:spcAft>
-              <a:defRPr sz="1300">
-                <a:solidFill>
-                  <a:srgbClr val="1E293B"/>
-                </a:solidFill>
-              </a:defRPr>
-            </a:pPr>
-            <a:r>
-              <a:t>   Consists of Status Line (`VERSION STATUS_CODE PHRASE`), Header Lines (`Content-Type:`, `Content-Length:`, `Set-Cookie:`), Blank Line, and Entity Body.</a:t>
+              <a:defRPr sz="1250">
+                <a:solidFill>
+                  <a:srgbClr val="0F172A"/>
+                </a:solidFill>
+              </a:defRPr>
+            </a:pPr>
+            <a:r>
+              <a:t>   HTTP servers maintain no state across successive requests from the same client. State is tracked using Cookies (via `Set-Cookie` and `Cookie` headers) and Session Tokens.</a:t>
             </a:r>
           </a:p>
           <a:p>
@@ -3589,29 +3728,29 @@
               <a:spcAft>
                 <a:spcPts val="200"/>
               </a:spcAft>
-              <a:defRPr b="1" sz="1500">
+              <a:defRPr b="1" sz="1450">
                 <a:solidFill>
                   <a:srgbClr val="0F1E4A"/>
                 </a:solidFill>
               </a:defRPr>
             </a:pPr>
             <a:r>
-              <a:t>• HTTP Methods</a:t>
+              <a:t>• Conditional GET &amp; Web Caching</a:t>
             </a:r>
           </a:p>
           <a:p>
             <a:pPr>
               <a:spcAft>
-                <a:spcPts val="800"/>
+                <a:spcPts val="700"/>
               </a:spcAft>
-              <a:defRPr sz="1300">
-                <a:solidFill>
-                  <a:srgbClr val="1E293B"/>
-                </a:solidFill>
-              </a:defRPr>
-            </a:pPr>
-            <a:r>
-              <a:t>   GET (retrieve data), POST (submit form/JSON), HEAD (fetch headers only), PUT (upload/replace resource), DELETE (remove resource).</a:t>
+              <a:defRPr sz="1250">
+                <a:solidFill>
+                  <a:srgbClr val="0F172A"/>
+                </a:solidFill>
+              </a:defRPr>
+            </a:pPr>
+            <a:r>
+              <a:t>   Clients and Proxy Caches avoid re-transmitting unmodified objects using the `If-Modified-Since` request header. If object unchanged, server responds `304 Not Modified` with zero body bits.</a:t>
             </a:r>
           </a:p>
         </p:txBody>
@@ -3624,14 +3763,14 @@
         </p:nvSpPr>
         <p:spPr>
           <a:xfrm>
-            <a:off x="7955279" y="1280160"/>
-            <a:ext cx="3566160" cy="4846320"/>
+            <a:off x="7955279" y="1234440"/>
+            <a:ext cx="3566160" cy="4892040"/>
           </a:xfrm>
           <a:prstGeom prst="roundRect">
             <a:avLst/>
           </a:prstGeom>
           <a:solidFill>
-            <a:srgbClr val="F1F5F9"/>
+            <a:srgbClr val="F8FAFC"/>
           </a:solidFill>
           <a:ln w="19050">
             <a:solidFill>
@@ -3669,7 +3808,7 @@
         </p:nvSpPr>
         <p:spPr>
           <a:xfrm>
-            <a:off x="8138160" y="1417320"/>
+            <a:off x="8138160" y="1371600"/>
             <a:ext cx="3200400" cy="4572000"/>
           </a:xfrm>
           <a:prstGeom prst="rect">
@@ -3704,7 +3843,7 @@
               </a:spcAft>
               <a:defRPr sz="1200">
                 <a:solidFill>
-                  <a:srgbClr val="1E293B"/>
+                  <a:srgbClr val="0F172A"/>
                 </a:solidFill>
               </a:defRPr>
             </a:pPr>
@@ -3719,7 +3858,7 @@
               </a:spcAft>
               <a:defRPr sz="1200">
                 <a:solidFill>
-                  <a:srgbClr val="1E293B"/>
+                  <a:srgbClr val="0F172A"/>
                 </a:solidFill>
               </a:defRPr>
             </a:pPr>
@@ -3734,12 +3873,12 @@
               </a:spcAft>
               <a:defRPr sz="1200">
                 <a:solidFill>
-                  <a:srgbClr val="1E293B"/>
-                </a:solidFill>
-              </a:defRPr>
-            </a:pPr>
-            <a:r>
-              <a:t>→ 304 Not Modified: Cache valid</a:t>
+                  <a:srgbClr val="0F172A"/>
+                </a:solidFill>
+              </a:defRPr>
+            </a:pPr>
+            <a:r>
+              <a:t>→ 304 Not Modified: Cache hit</a:t>
             </a:r>
           </a:p>
           <a:p>
@@ -3749,12 +3888,12 @@
               </a:spcAft>
               <a:defRPr sz="1200">
                 <a:solidFill>
-                  <a:srgbClr val="1E293B"/>
-                </a:solidFill>
-              </a:defRPr>
-            </a:pPr>
-            <a:r>
-              <a:t>→ 400 Bad Request: Malformed</a:t>
+                  <a:srgbClr val="0F172A"/>
+                </a:solidFill>
+              </a:defRPr>
+            </a:pPr>
+            <a:r>
+              <a:t>→ 400 Bad Request: Syntax error</a:t>
             </a:r>
           </a:p>
           <a:p>
@@ -3764,12 +3903,12 @@
               </a:spcAft>
               <a:defRPr sz="1200">
                 <a:solidFill>
-                  <a:srgbClr val="1E293B"/>
-                </a:solidFill>
-              </a:defRPr>
-            </a:pPr>
-            <a:r>
-              <a:t>→ 404 Not Found: Missing URL</a:t>
+                  <a:srgbClr val="0F172A"/>
+                </a:solidFill>
+              </a:defRPr>
+            </a:pPr>
+            <a:r>
+              <a:t>→ 404 Not Found: Resource absent</a:t>
             </a:r>
           </a:p>
           <a:p>
@@ -3779,12 +3918,12 @@
               </a:spcAft>
               <a:defRPr sz="1200">
                 <a:solidFill>
-                  <a:srgbClr val="1E293B"/>
-                </a:solidFill>
-              </a:defRPr>
-            </a:pPr>
-            <a:r>
-              <a:t>→ 500 Internal Server Error</a:t>
+                  <a:srgbClr val="0F172A"/>
+                </a:solidFill>
+              </a:defRPr>
+            </a:pPr>
+            <a:r>
+              <a:t>→ 503 Service Unavailable: Busy</a:t>
             </a:r>
           </a:p>
         </p:txBody>
@@ -3797,8 +3936,8 @@
         </p:nvSpPr>
         <p:spPr>
           <a:xfrm>
-            <a:off x="731520" y="6309360"/>
-            <a:ext cx="10789920" cy="365760"/>
+            <a:off x="731520" y="6327648"/>
+            <a:ext cx="10789920" cy="320040"/>
           </a:xfrm>
           <a:prstGeom prst="rect">
             <a:avLst/>
@@ -3820,6 +3959,41 @@
             </a:pPr>
             <a:r>
               <a:t>PCCST501 Computer Networks | KTU 2024 Scheme | Prof. Anju Markose | Assistant Professor, Dept. of CSE | VJCET</a:t>
+            </a:r>
+          </a:p>
+        </p:txBody>
+      </p:sp>
+      <p:sp>
+        <p:nvSpPr>
+          <p:cNvPr id="10" name="TextBox 9"/>
+          <p:cNvSpPr txBox="1"/>
+          <p:nvPr/>
+        </p:nvSpPr>
+        <p:spPr>
+          <a:xfrm>
+            <a:off x="6858000" y="6327648"/>
+            <a:ext cx="4572000" cy="320040"/>
+          </a:xfrm>
+          <a:prstGeom prst="rect">
+            <a:avLst/>
+          </a:prstGeom>
+          <a:noFill/>
+        </p:spPr>
+        <p:txBody>
+          <a:bodyPr wrap="none">
+            <a:spAutoFit/>
+          </a:bodyPr>
+          <a:lstStyle/>
+          <a:p>
+            <a:pPr algn="r">
+              <a:defRPr sz="950">
+                <a:solidFill>
+                  <a:srgbClr val="64748B"/>
+                </a:solidFill>
+              </a:defRPr>
+            </a:pPr>
+            <a:r>
+              <a:t>Dept. of CSE, VJCET</a:t>
             </a:r>
           </a:p>
         </p:txBody>
@@ -3951,14 +4125,14 @@
           <a:lstStyle/>
           <a:p>
             <a:pPr>
-              <a:defRPr b="1" sz="2300">
+              <a:defRPr b="1" sz="2200">
                 <a:solidFill>
                   <a:srgbClr val="F8FAFC"/>
                 </a:solidFill>
               </a:defRPr>
             </a:pPr>
             <a:r>
-              <a:t>1.4.2 HTTP Connections: Non-Persistent vs Persistent</a:t>
+              <a:t>1.4.2 HTTP/1.0 vs HTTP/1.1 vs HTTP/2 vs HTTP/3</a:t>
             </a:r>
           </a:p>
         </p:txBody>
@@ -3993,7 +4167,7 @@
               </a:defRPr>
             </a:pPr>
             <a:r>
-              <a:t>M1.4 HTTP CONNECTIONS</a:t>
+              <a:t>M1.4 HTTP EVOLUTION</a:t>
             </a:r>
           </a:p>
         </p:txBody>
@@ -4006,18 +4180,18 @@
         </p:nvSpPr>
         <p:spPr>
           <a:xfrm>
-            <a:off x="731520" y="1280160"/>
-            <a:ext cx="5212080" cy="4846320"/>
+            <a:off x="731520" y="1234440"/>
+            <a:ext cx="3383280" cy="4892040"/>
           </a:xfrm>
           <a:prstGeom prst="roundRect">
             <a:avLst/>
           </a:prstGeom>
           <a:solidFill>
-            <a:srgbClr val="F1F5F9"/>
+            <a:srgbClr val="F8FAFC"/>
           </a:solidFill>
           <a:ln w="19050">
             <a:solidFill>
-              <a:srgbClr val="0E7490"/>
+              <a:srgbClr val="0F1E4A"/>
             </a:solidFill>
           </a:ln>
         </p:spPr>
@@ -4051,8 +4225,8 @@
         </p:nvSpPr>
         <p:spPr>
           <a:xfrm>
-            <a:off x="914400" y="1417320"/>
-            <a:ext cx="4846320" cy="4572000"/>
+            <a:off x="914400" y="1371600"/>
+            <a:ext cx="3017520" cy="4572000"/>
           </a:xfrm>
           <a:prstGeom prst="rect">
             <a:avLst/>
@@ -4067,91 +4241,61 @@
           <a:p>
             <a:pPr>
               <a:spcAft>
-                <a:spcPts val="1200"/>
+                <a:spcPts val="1000"/>
               </a:spcAft>
-              <a:defRPr b="1" sz="1600">
+              <a:defRPr b="1" sz="1550">
                 <a:solidFill>
                   <a:srgbClr val="0F1E4A"/>
                 </a:solidFill>
               </a:defRPr>
             </a:pPr>
             <a:r>
-              <a:t>Non-Persistent HTTP (HTTP/1.0)</a:t>
+              <a:t>HTTP/1.0 &amp; HTTP/1.1</a:t>
             </a:r>
           </a:p>
           <a:p>
             <a:pPr>
               <a:spcAft>
-                <a:spcPts val="600"/>
+                <a:spcPts val="500"/>
               </a:spcAft>
-              <a:defRPr sz="1250">
-                <a:solidFill>
-                  <a:srgbClr val="1E293B"/>
-                </a:solidFill>
-              </a:defRPr>
-            </a:pPr>
-            <a:r>
-              <a:t>• Connection Rule: At most one object sent over a single TCP connection</a:t>
+              <a:defRPr sz="1200">
+                <a:solidFill>
+                  <a:srgbClr val="0F172A"/>
+                </a:solidFill>
+              </a:defRPr>
+            </a:pPr>
+            <a:r>
+              <a:t>• 1.0 Non-Persistent: Opens fresh TCP connection per object ($2 \cdot RTT$ per object); high latency</a:t>
             </a:r>
           </a:p>
           <a:p>
             <a:pPr>
               <a:spcAft>
-                <a:spcPts val="600"/>
+                <a:spcPts val="500"/>
               </a:spcAft>
-              <a:defRPr sz="1250">
-                <a:solidFill>
-                  <a:srgbClr val="1E293B"/>
-                </a:solidFill>
-              </a:defRPr>
-            </a:pPr>
-            <a:r>
-              <a:t>• Overhead: New TCP 3-way handshake for EVERY referenced object</a:t>
+              <a:defRPr sz="1200">
+                <a:solidFill>
+                  <a:srgbClr val="0F172A"/>
+                </a:solidFill>
+              </a:defRPr>
+            </a:pPr>
+            <a:r>
+              <a:t>• 1.1 Persistent: Reuses single TCP connection for multiple objects; default `Keep-Alive`</a:t>
             </a:r>
           </a:p>
           <a:p>
             <a:pPr>
               <a:spcAft>
-                <a:spcPts val="600"/>
+                <a:spcPts val="500"/>
               </a:spcAft>
-              <a:defRPr sz="1250">
-                <a:solidFill>
-                  <a:srgbClr val="1E293B"/>
-                </a:solidFill>
-              </a:defRPr>
-            </a:pPr>
-            <a:r>
-              <a:t>• Response Time: 2 RTTs + Transmission Time per referenced object</a:t>
-            </a:r>
-          </a:p>
-          <a:p>
-            <a:pPr>
-              <a:spcAft>
-                <a:spcPts val="600"/>
-              </a:spcAft>
-              <a:defRPr sz="1250">
-                <a:solidFill>
-                  <a:srgbClr val="1E293B"/>
-                </a:solidFill>
-              </a:defRPr>
-            </a:pPr>
-            <a:r>
-              <a:t>• Server Load: High OS overhead managing multiple short-lived sockets</a:t>
-            </a:r>
-          </a:p>
-          <a:p>
-            <a:pPr>
-              <a:spcAft>
-                <a:spcPts val="600"/>
-              </a:spcAft>
-              <a:defRPr sz="1250">
-                <a:solidFill>
-                  <a:srgbClr val="1E293B"/>
-                </a:solidFill>
-              </a:defRPr>
-            </a:pPr>
-            <a:r>
-              <a:t>• Parallel Connections: Browsers open ~6 parallel connections to compensate</a:t>
+              <a:defRPr sz="1200">
+                <a:solidFill>
+                  <a:srgbClr val="0F172A"/>
+                </a:solidFill>
+              </a:defRPr>
+            </a:pPr>
+            <a:r>
+              <a:t>• Pipelining: Sends multiple requests without waiting for replies (suffers Head-of-Line blocking)</a:t>
             </a:r>
           </a:p>
         </p:txBody>
@@ -4164,8 +4308,8 @@
         </p:nvSpPr>
         <p:spPr>
           <a:xfrm>
-            <a:off x="6309360" y="1280160"/>
-            <a:ext cx="5212080" cy="4846320"/>
+            <a:off x="4389120" y="1234440"/>
+            <a:ext cx="3383280" cy="4892040"/>
           </a:xfrm>
           <a:prstGeom prst="roundRect">
             <a:avLst/>
@@ -4175,7 +4319,7 @@
           </a:solidFill>
           <a:ln w="19050">
             <a:solidFill>
-              <a:srgbClr val="0F1E4A"/>
+              <a:srgbClr val="0E7490"/>
             </a:solidFill>
           </a:ln>
         </p:spPr>
@@ -4209,8 +4353,8 @@
         </p:nvSpPr>
         <p:spPr>
           <a:xfrm>
-            <a:off x="6492240" y="1417320"/>
-            <a:ext cx="4846320" cy="4572000"/>
+            <a:off x="4572000" y="1371600"/>
+            <a:ext cx="3017520" cy="4572000"/>
           </a:xfrm>
           <a:prstGeom prst="rect">
             <a:avLst/>
@@ -4225,105 +4369,135 @@
           <a:p>
             <a:pPr>
               <a:spcAft>
-                <a:spcPts val="1200"/>
+                <a:spcPts val="1000"/>
               </a:spcAft>
-              <a:defRPr b="1" sz="1600">
+              <a:defRPr b="1" sz="1550">
                 <a:solidFill>
                   <a:srgbClr val="0E7490"/>
                 </a:solidFill>
               </a:defRPr>
             </a:pPr>
             <a:r>
-              <a:t>Persistent HTTP (HTTP/1.1)</a:t>
+              <a:t>HTTP/2 (RFC 7540)</a:t>
             </a:r>
           </a:p>
           <a:p>
             <a:pPr>
               <a:spcAft>
-                <a:spcPts val="600"/>
+                <a:spcPts val="500"/>
               </a:spcAft>
-              <a:defRPr sz="1250">
-                <a:solidFill>
-                  <a:srgbClr val="1E293B"/>
-                </a:solidFill>
-              </a:defRPr>
-            </a:pPr>
-            <a:r>
-              <a:t>• Connection Rule: Multiple objects sent over a SINGLE open TCP connection</a:t>
+              <a:defRPr sz="1200">
+                <a:solidFill>
+                  <a:srgbClr val="0F172A"/>
+                </a:solidFill>
+              </a:defRPr>
+            </a:pPr>
+            <a:r>
+              <a:t>• Binary Framing: Replaces plain text with binary frame parser (Headers &amp; Data frames)</a:t>
             </a:r>
           </a:p>
           <a:p>
             <a:pPr>
               <a:spcAft>
-                <a:spcPts val="600"/>
+                <a:spcPts val="500"/>
               </a:spcAft>
-              <a:defRPr sz="1250">
-                <a:solidFill>
-                  <a:srgbClr val="1E293B"/>
-                </a:solidFill>
-              </a:defRPr>
-            </a:pPr>
-            <a:r>
-              <a:t>• Pipelining: Client sends subsequent requests without waiting for replies</a:t>
+              <a:defRPr sz="1200">
+                <a:solidFill>
+                  <a:srgbClr val="0F172A"/>
+                </a:solidFill>
+              </a:defRPr>
+            </a:pPr>
+            <a:r>
+              <a:t>• Multiplexing: Interleaves streams over single TCP; eliminates HTTP Head-of-Line blocking</a:t>
             </a:r>
           </a:p>
           <a:p>
             <a:pPr>
               <a:spcAft>
-                <a:spcPts val="600"/>
+                <a:spcPts val="500"/>
               </a:spcAft>
-              <a:defRPr sz="1250">
-                <a:solidFill>
-                  <a:srgbClr val="1E293B"/>
-                </a:solidFill>
-              </a:defRPr>
-            </a:pPr>
-            <a:r>
-              <a:t>• Response Time: 1 RTT for initial connection + 1 RTT per batch of objects</a:t>
+              <a:defRPr sz="1200">
+                <a:solidFill>
+                  <a:srgbClr val="0F172A"/>
+                </a:solidFill>
+              </a:defRPr>
+            </a:pPr>
+            <a:r>
+              <a:t>• Server Push: Proactively pushes critical resources (CSS, JS) before client requests them</a:t>
             </a:r>
           </a:p>
           <a:p>
             <a:pPr>
               <a:spcAft>
-                <a:spcPts val="600"/>
+                <a:spcPts val="500"/>
               </a:spcAft>
-              <a:defRPr sz="1250">
-                <a:solidFill>
-                  <a:srgbClr val="1E293B"/>
-                </a:solidFill>
-              </a:defRPr>
-            </a:pPr>
-            <a:r>
-              <a:t>• Keep-Alive: Header `Connection: keep-alive` prevents socket teardown</a:t>
-            </a:r>
-          </a:p>
-          <a:p>
-            <a:pPr>
-              <a:spcAft>
-                <a:spcPts val="600"/>
-              </a:spcAft>
-              <a:defRPr sz="1250">
-                <a:solidFill>
-                  <a:srgbClr val="1E293B"/>
-                </a:solidFill>
-              </a:defRPr>
-            </a:pPr>
-            <a:r>
-              <a:t>• Head-of-Line Blocking: Slow first response blocks subsequent queued objects</a:t>
-            </a:r>
-          </a:p>
-        </p:txBody>
-      </p:sp>
-      <p:sp>
-        <p:nvSpPr>
-          <p:cNvPr id="10" name="TextBox 9"/>
+              <a:defRPr sz="1200">
+                <a:solidFill>
+                  <a:srgbClr val="0F172A"/>
+                </a:solidFill>
+              </a:defRPr>
+            </a:pPr>
+            <a:r>
+              <a:t>• HPACK: Compresses redundant header fields</a:t>
+            </a:r>
+          </a:p>
+        </p:txBody>
+      </p:sp>
+      <p:sp>
+        <p:nvSpPr>
+          <p:cNvPr id="10" name="Rounded Rectangle 9"/>
+          <p:cNvSpPr/>
+          <p:nvPr/>
+        </p:nvSpPr>
+        <p:spPr>
+          <a:xfrm>
+            <a:off x="8046720" y="1234440"/>
+            <a:ext cx="3383280" cy="4892040"/>
+          </a:xfrm>
+          <a:prstGeom prst="roundRect">
+            <a:avLst/>
+          </a:prstGeom>
+          <a:solidFill>
+            <a:srgbClr val="F8FAFC"/>
+          </a:solidFill>
+          <a:ln w="19050">
+            <a:solidFill>
+              <a:srgbClr val="D97706"/>
+            </a:solidFill>
+          </a:ln>
+        </p:spPr>
+        <p:style>
+          <a:lnRef idx="1">
+            <a:schemeClr val="accent1"/>
+          </a:lnRef>
+          <a:fillRef idx="3">
+            <a:schemeClr val="accent1"/>
+          </a:fillRef>
+          <a:effectRef idx="2">
+            <a:schemeClr val="accent1"/>
+          </a:effectRef>
+          <a:fontRef idx="minor">
+            <a:schemeClr val="lt1"/>
+          </a:fontRef>
+        </p:style>
+        <p:txBody>
+          <a:bodyPr rtlCol="0" anchor="ctr"/>
+          <a:lstStyle/>
+          <a:p>
+            <a:pPr algn="ctr"/>
+          </a:p>
+        </p:txBody>
+      </p:sp>
+      <p:sp>
+        <p:nvSpPr>
+          <p:cNvPr id="11" name="TextBox 10"/>
           <p:cNvSpPr txBox="1"/>
           <p:nvPr/>
         </p:nvSpPr>
         <p:spPr>
           <a:xfrm>
-            <a:off x="731520" y="6309360"/>
-            <a:ext cx="10789920" cy="365760"/>
+            <a:off x="8229600" y="1371600"/>
+            <a:ext cx="3017520" cy="4572000"/>
           </a:xfrm>
           <a:prstGeom prst="rect">
             <a:avLst/>
@@ -4331,6 +4505,89 @@
           <a:noFill/>
         </p:spPr>
         <p:txBody>
+          <a:bodyPr wrap="square">
+            <a:spAutoFit/>
+          </a:bodyPr>
+          <a:lstStyle/>
+          <a:p>
+            <a:pPr>
+              <a:spcAft>
+                <a:spcPts val="1000"/>
+              </a:spcAft>
+              <a:defRPr b="1" sz="1550">
+                <a:solidFill>
+                  <a:srgbClr val="D97706"/>
+                </a:solidFill>
+              </a:defRPr>
+            </a:pPr>
+            <a:r>
+              <a:t>HTTP/3 (QUIC / RFC 9000)</a:t>
+            </a:r>
+          </a:p>
+          <a:p>
+            <a:pPr>
+              <a:spcAft>
+                <a:spcPts val="500"/>
+              </a:spcAft>
+              <a:defRPr sz="1200">
+                <a:solidFill>
+                  <a:srgbClr val="0F172A"/>
+                </a:solidFill>
+              </a:defRPr>
+            </a:pPr>
+            <a:r>
+              <a:t>• QUIC over UDP: Replaces TCP with QUIC transport layer over UDP</a:t>
+            </a:r>
+          </a:p>
+          <a:p>
+            <a:pPr>
+              <a:spcAft>
+                <a:spcPts val="500"/>
+              </a:spcAft>
+              <a:defRPr sz="1200">
+                <a:solidFill>
+                  <a:srgbClr val="0F172A"/>
+                </a:solidFill>
+              </a:defRPr>
+            </a:pPr>
+            <a:r>
+              <a:t>• Zero HoL Blocking: Packet loss in one stream never stalls unrelated streams</a:t>
+            </a:r>
+          </a:p>
+          <a:p>
+            <a:pPr>
+              <a:spcAft>
+                <a:spcPts val="500"/>
+              </a:spcAft>
+              <a:defRPr sz="1200">
+                <a:solidFill>
+                  <a:srgbClr val="0F172A"/>
+                </a:solidFill>
+              </a:defRPr>
+            </a:pPr>
+            <a:r>
+              <a:t>• 0-RTT Handshake: Combines connection setup and TLS 1.3 cryptographic handshake in 1 round-trip</a:t>
+            </a:r>
+          </a:p>
+        </p:txBody>
+      </p:sp>
+      <p:sp>
+        <p:nvSpPr>
+          <p:cNvPr id="12" name="TextBox 11"/>
+          <p:cNvSpPr txBox="1"/>
+          <p:nvPr/>
+        </p:nvSpPr>
+        <p:spPr>
+          <a:xfrm>
+            <a:off x="731520" y="6327648"/>
+            <a:ext cx="10789920" cy="320040"/>
+          </a:xfrm>
+          <a:prstGeom prst="rect">
+            <a:avLst/>
+          </a:prstGeom>
+          <a:noFill/>
+        </p:spPr>
+        <p:txBody>
           <a:bodyPr wrap="none">
             <a:spAutoFit/>
           </a:bodyPr>
@@ -4345,6 +4602,41 @@
             </a:pPr>
             <a:r>
               <a:t>PCCST501 Computer Networks | KTU 2024 Scheme | Prof. Anju Markose | Assistant Professor, Dept. of CSE | VJCET</a:t>
+            </a:r>
+          </a:p>
+        </p:txBody>
+      </p:sp>
+      <p:sp>
+        <p:nvSpPr>
+          <p:cNvPr id="13" name="TextBox 12"/>
+          <p:cNvSpPr txBox="1"/>
+          <p:nvPr/>
+        </p:nvSpPr>
+        <p:spPr>
+          <a:xfrm>
+            <a:off x="6858000" y="6327648"/>
+            <a:ext cx="4572000" cy="320040"/>
+          </a:xfrm>
+          <a:prstGeom prst="rect">
+            <a:avLst/>
+          </a:prstGeom>
+          <a:noFill/>
+        </p:spPr>
+        <p:txBody>
+          <a:bodyPr wrap="none">
+            <a:spAutoFit/>
+          </a:bodyPr>
+          <a:lstStyle/>
+          <a:p>
+            <a:pPr algn="r">
+              <a:defRPr sz="950">
+                <a:solidFill>
+                  <a:srgbClr val="64748B"/>
+                </a:solidFill>
+              </a:defRPr>
+            </a:pPr>
+            <a:r>
+              <a:t>Dept. of CSE, VJCET</a:t>
             </a:r>
           </a:p>
         </p:txBody>
@@ -4476,14 +4768,14 @@
           <a:lstStyle/>
           <a:p>
             <a:pPr>
-              <a:defRPr b="1" sz="2300">
+              <a:defRPr b="1" sz="2200">
                 <a:solidFill>
                   <a:srgbClr val="F8FAFC"/>
                 </a:solidFill>
               </a:defRPr>
             </a:pPr>
             <a:r>
-              <a:t>1.4.3 HTTP Evolution: HTTP/2 &amp; HTTP/3 &amp; Web Caching</a:t>
+              <a:t>1.4.3 Worked KTU Numerical: Web Page Retrieval Time</a:t>
             </a:r>
           </a:p>
         </p:txBody>
@@ -4518,204 +4810,31 @@
               </a:defRPr>
             </a:pPr>
             <a:r>
-              <a:t>M1.4 HTTP/2 &amp; CACHING</a:t>
-            </a:r>
-          </a:p>
-        </p:txBody>
-      </p:sp>
-      <p:sp>
-        <p:nvSpPr>
-          <p:cNvPr id="6" name="TextBox 5"/>
-          <p:cNvSpPr txBox="1"/>
-          <p:nvPr/>
-        </p:nvSpPr>
-        <p:spPr>
-          <a:xfrm>
-            <a:off x="731520" y="1280160"/>
-            <a:ext cx="6858000" cy="4937760"/>
-          </a:xfrm>
-          <a:prstGeom prst="rect">
-            <a:avLst/>
-          </a:prstGeom>
-          <a:noFill/>
-        </p:spPr>
-        <p:txBody>
-          <a:bodyPr wrap="square">
-            <a:spAutoFit/>
-          </a:bodyPr>
-          <a:lstStyle/>
-          <a:p>
-            <a:pPr>
-              <a:spcAft>
-                <a:spcPts val="200"/>
-              </a:spcAft>
-              <a:defRPr b="1" sz="1500">
-                <a:solidFill>
-                  <a:srgbClr val="0F1E4A"/>
-                </a:solidFill>
-              </a:defRPr>
-            </a:pPr>
-            <a:r>
-              <a:t>• HTTP/2 Innovations (RFC 7540)</a:t>
-            </a:r>
-          </a:p>
-          <a:p>
-            <a:pPr>
-              <a:spcAft>
-                <a:spcPts val="800"/>
-              </a:spcAft>
-              <a:defRPr sz="1300">
-                <a:solidFill>
-                  <a:srgbClr val="1E293B"/>
-                </a:solidFill>
-              </a:defRPr>
-            </a:pPr>
-            <a:r>
-              <a:t>   Replaces plain text with Binary Framing Layer. Introduces Stream Multiplexing: multiple requests/responses interleaved over one TCP connection without Head-of-Line (HoL) blocking.</a:t>
-            </a:r>
-          </a:p>
-          <a:p>
-            <a:pPr>
-              <a:spcAft>
-                <a:spcPts val="200"/>
-              </a:spcAft>
-              <a:defRPr b="1" sz="1500">
-                <a:solidFill>
-                  <a:srgbClr val="0F1E4A"/>
-                </a:solidFill>
-              </a:defRPr>
-            </a:pPr>
-            <a:r>
-              <a:t>• Header Compression &amp; Server Push</a:t>
-            </a:r>
-          </a:p>
-          <a:p>
-            <a:pPr>
-              <a:spcAft>
-                <a:spcPts val="800"/>
-              </a:spcAft>
-              <a:defRPr sz="1300">
-                <a:solidFill>
-                  <a:srgbClr val="1E293B"/>
-                </a:solidFill>
-              </a:defRPr>
-            </a:pPr>
-            <a:r>
-              <a:t>   HPACK algorithm compresses redundant headers across requests. Server Push proactively sends required assets (CSS/JS) before client requests them.</a:t>
-            </a:r>
-          </a:p>
-          <a:p>
-            <a:pPr>
-              <a:spcAft>
-                <a:spcPts val="200"/>
-              </a:spcAft>
-              <a:defRPr b="1" sz="1500">
-                <a:solidFill>
-                  <a:srgbClr val="0F1E4A"/>
-                </a:solidFill>
-              </a:defRPr>
-            </a:pPr>
-            <a:r>
-              <a:t>• HTTP/3 over QUIC (RFC 9000)</a:t>
-            </a:r>
-          </a:p>
-          <a:p>
-            <a:pPr>
-              <a:spcAft>
-                <a:spcPts val="800"/>
-              </a:spcAft>
-              <a:defRPr sz="1300">
-                <a:solidFill>
-                  <a:srgbClr val="1E293B"/>
-                </a:solidFill>
-              </a:defRPr>
-            </a:pPr>
-            <a:r>
-              <a:t>   Runs over UDP instead of TCP. Eliminates TCP-level Head-of-Line blocking and achieves zero-RTT connection resumption with integrated TLS 1.3.</a:t>
-            </a:r>
-          </a:p>
-          <a:p>
-            <a:pPr>
-              <a:spcAft>
-                <a:spcPts val="200"/>
-              </a:spcAft>
-              <a:defRPr b="1" sz="1500">
-                <a:solidFill>
-                  <a:srgbClr val="0F1E4A"/>
-                </a:solidFill>
-              </a:defRPr>
-            </a:pPr>
-            <a:r>
-              <a:t>• Web Caching &amp; Proxy Servers</a:t>
-            </a:r>
-          </a:p>
-          <a:p>
-            <a:pPr>
-              <a:spcAft>
-                <a:spcPts val="800"/>
-              </a:spcAft>
-              <a:defRPr sz="1300">
-                <a:solidFill>
-                  <a:srgbClr val="1E293B"/>
-                </a:solidFill>
-              </a:defRPr>
-            </a:pPr>
-            <a:r>
-              <a:t>   Proxy servers satisfy client requests from local storage without contacting origin server. Reduces response time and access link traffic.</a:t>
-            </a:r>
-          </a:p>
-          <a:p>
-            <a:pPr>
-              <a:spcAft>
-                <a:spcPts val="200"/>
-              </a:spcAft>
-              <a:defRPr b="1" sz="1500">
-                <a:solidFill>
-                  <a:srgbClr val="0F1E4A"/>
-                </a:solidFill>
-              </a:defRPr>
-            </a:pPr>
-            <a:r>
-              <a:t>• Conditional GET (`If-Modified-Since`)</a:t>
-            </a:r>
-          </a:p>
-          <a:p>
-            <a:pPr>
-              <a:spcAft>
-                <a:spcPts val="800"/>
-              </a:spcAft>
-              <a:defRPr sz="1300">
-                <a:solidFill>
-                  <a:srgbClr val="1E293B"/>
-                </a:solidFill>
-              </a:defRPr>
-            </a:pPr>
-            <a:r>
-              <a:t>   Cache verifies freshness with origin server. If object unchanged, server returns `304 Not Modified` with zero entity body.</a:t>
-            </a:r>
-          </a:p>
-        </p:txBody>
-      </p:sp>
-      <p:sp>
-        <p:nvSpPr>
-          <p:cNvPr id="7" name="Rounded Rectangle 6"/>
+              <a:t>M1.4 WORKED PROBLEM</a:t>
+            </a:r>
+          </a:p>
+        </p:txBody>
+      </p:sp>
+      <p:sp>
+        <p:nvSpPr>
+          <p:cNvPr id="6" name="Rounded Rectangle 5"/>
           <p:cNvSpPr/>
           <p:nvPr/>
         </p:nvSpPr>
         <p:spPr>
           <a:xfrm>
-            <a:off x="7955279" y="1280160"/>
-            <a:ext cx="3566160" cy="4846320"/>
+            <a:off x="731520" y="1234440"/>
+            <a:ext cx="5486400" cy="4892040"/>
           </a:xfrm>
           <a:prstGeom prst="roundRect">
             <a:avLst/>
           </a:prstGeom>
           <a:solidFill>
-            <a:srgbClr val="F1F5F9"/>
+            <a:srgbClr val="F8FAFC"/>
           </a:solidFill>
           <a:ln w="19050">
             <a:solidFill>
-              <a:srgbClr val="0E7490"/>
+              <a:srgbClr val="0F1E4A"/>
             </a:solidFill>
           </a:ln>
         </p:spPr>
@@ -4743,14 +4862,14 @@
       </p:sp>
       <p:sp>
         <p:nvSpPr>
-          <p:cNvPr id="8" name="TextBox 7"/>
+          <p:cNvPr id="7" name="TextBox 6"/>
           <p:cNvSpPr txBox="1"/>
           <p:nvPr/>
         </p:nvSpPr>
         <p:spPr>
           <a:xfrm>
-            <a:off x="8138160" y="1417320"/>
-            <a:ext cx="3200400" cy="4572000"/>
+            <a:off x="914400" y="1371600"/>
+            <a:ext cx="5120640" cy="4572000"/>
           </a:xfrm>
           <a:prstGeom prst="rect">
             <a:avLst/>
@@ -4765,16 +4884,716 @@
           <a:p>
             <a:pPr>
               <a:spcAft>
+                <a:spcPts val="800"/>
+              </a:spcAft>
+              <a:defRPr b="1" sz="1450">
+                <a:solidFill>
+                  <a:srgbClr val="0F1E4A"/>
+                </a:solidFill>
+              </a:defRPr>
+            </a:pPr>
+            <a:r>
+              <a:t>📌 KTU Numerical Problem Statement</a:t>
+            </a:r>
+          </a:p>
+          <a:p>
+            <a:pPr>
+              <a:spcAft>
+                <a:spcPts val="1400"/>
+              </a:spcAft>
+              <a:defRPr sz="1250">
+                <a:solidFill>
+                  <a:srgbClr val="0F172A"/>
+                </a:solidFill>
+              </a:defRPr>
+            </a:pPr>
+            <a:r>
+              <a:t>A base HTML page references 8 small embedded JPEG images located on the same server. Round-Trip Time between client and server is RTT = 40 ms. Base HTML transmission time is negligible. Calculate total retrieval time for: (a) HTTP/1.0 Non-Persistent with sequential TCP connections, (b) HTTP/1.1 Persistent without pipelining, (c) HTTP/1.1 Persistent with pipelining.</a:t>
+            </a:r>
+          </a:p>
+          <a:p>
+            <a:pPr>
+              <a:spcAft>
+                <a:spcPts val="600"/>
+              </a:spcAft>
+              <a:defRPr b="1" sz="1350">
+                <a:solidFill>
+                  <a:srgbClr val="0E7490"/>
+                </a:solidFill>
+              </a:defRPr>
+            </a:pPr>
+            <a:r>
+              <a:t>📐 Governing Formulas &amp; Principles:</a:t>
+            </a:r>
+          </a:p>
+          <a:p>
+            <a:pPr>
+              <a:spcAft>
+                <a:spcPts val="400"/>
+              </a:spcAft>
+              <a:defRPr sz="1200">
+                <a:solidFill>
+                  <a:srgbClr val="0F172A"/>
+                </a:solidFill>
+              </a:defRPr>
+            </a:pPr>
+            <a:r>
+              <a:t>• Non-Persistent: 1 TCP Handshake (1 RTT) + 1 Request/Response (1 RTT) = 2 RTT per object</a:t>
+            </a:r>
+          </a:p>
+          <a:p>
+            <a:pPr>
+              <a:spcAft>
+                <a:spcPts val="400"/>
+              </a:spcAft>
+              <a:defRPr sz="1200">
+                <a:solidFill>
+                  <a:srgbClr val="0F172A"/>
+                </a:solidFill>
+              </a:defRPr>
+            </a:pPr>
+            <a:r>
+              <a:t>• Persistent without Pipelining: 1 TCP Handshake (1 RTT) + 1 RTT for Base + N * 1 RTT for images</a:t>
+            </a:r>
+          </a:p>
+          <a:p>
+            <a:pPr>
+              <a:spcAft>
+                <a:spcPts val="400"/>
+              </a:spcAft>
+              <a:defRPr sz="1200">
+                <a:solidFill>
+                  <a:srgbClr val="0F172A"/>
+                </a:solidFill>
+              </a:defRPr>
+            </a:pPr>
+            <a:r>
+              <a:t>• Persistent with Pipelining: 1 TCP Handshake (1 RTT) + 1 RTT for Base + 1 RTT for all images</a:t>
+            </a:r>
+          </a:p>
+        </p:txBody>
+      </p:sp>
+      <p:sp>
+        <p:nvSpPr>
+          <p:cNvPr id="8" name="Rounded Rectangle 7"/>
+          <p:cNvSpPr/>
+          <p:nvPr/>
+        </p:nvSpPr>
+        <p:spPr>
+          <a:xfrm>
+            <a:off x="6492240" y="1234440"/>
+            <a:ext cx="5029200" cy="4892040"/>
+          </a:xfrm>
+          <a:prstGeom prst="roundRect">
+            <a:avLst/>
+          </a:prstGeom>
+          <a:solidFill>
+            <a:srgbClr val="ECFDF5"/>
+          </a:solidFill>
+          <a:ln w="19050">
+            <a:solidFill>
+              <a:srgbClr val="10B981"/>
+            </a:solidFill>
+          </a:ln>
+        </p:spPr>
+        <p:style>
+          <a:lnRef idx="1">
+            <a:schemeClr val="accent1"/>
+          </a:lnRef>
+          <a:fillRef idx="3">
+            <a:schemeClr val="accent1"/>
+          </a:fillRef>
+          <a:effectRef idx="2">
+            <a:schemeClr val="accent1"/>
+          </a:effectRef>
+          <a:fontRef idx="minor">
+            <a:schemeClr val="lt1"/>
+          </a:fontRef>
+        </p:style>
+        <p:txBody>
+          <a:bodyPr rtlCol="0" anchor="ctr"/>
+          <a:lstStyle/>
+          <a:p>
+            <a:pPr algn="ctr"/>
+          </a:p>
+        </p:txBody>
+      </p:sp>
+      <p:sp>
+        <p:nvSpPr>
+          <p:cNvPr id="9" name="TextBox 8"/>
+          <p:cNvSpPr txBox="1"/>
+          <p:nvPr/>
+        </p:nvSpPr>
+        <p:spPr>
+          <a:xfrm>
+            <a:off x="6675120" y="1371600"/>
+            <a:ext cx="4663440" cy="4572000"/>
+          </a:xfrm>
+          <a:prstGeom prst="rect">
+            <a:avLst/>
+          </a:prstGeom>
+          <a:noFill/>
+        </p:spPr>
+        <p:txBody>
+          <a:bodyPr wrap="square">
+            <a:spAutoFit/>
+          </a:bodyPr>
+          <a:lstStyle/>
+          <a:p>
+            <a:pPr>
+              <a:spcAft>
+                <a:spcPts val="800"/>
+              </a:spcAft>
+              <a:defRPr b="1" sz="1450">
+                <a:solidFill>
+                  <a:srgbClr val="047857"/>
+                </a:solidFill>
+              </a:defRPr>
+            </a:pPr>
+            <a:r>
+              <a:t>📝 Step-by-Step Derivation &amp; Solution</a:t>
+            </a:r>
+          </a:p>
+          <a:p>
+            <a:pPr>
+              <a:spcAft>
+                <a:spcPts val="500"/>
+              </a:spcAft>
+              <a:defRPr sz="1200">
+                <a:solidFill>
+                  <a:srgbClr val="0F172A"/>
+                </a:solidFill>
+              </a:defRPr>
+            </a:pPr>
+            <a:r>
+              <a:t>Step 1: Total objects = 1 Base HTML + 8 Images = 9 objects.</a:t>
+            </a:r>
+          </a:p>
+          <a:p>
+            <a:pPr>
+              <a:spcAft>
+                <a:spcPts val="500"/>
+              </a:spcAft>
+              <a:defRPr sz="1200">
+                <a:solidFill>
+                  <a:srgbClr val="0F172A"/>
+                </a:solidFill>
+              </a:defRPr>
+            </a:pPr>
+            <a:r>
+              <a:t>Step 2: (a) Non-Persistent: 9 objects * 2 RTT = 18 RTT = 18 * 40 ms = 720 ms.</a:t>
+            </a:r>
+          </a:p>
+          <a:p>
+            <a:pPr>
+              <a:spcAft>
+                <a:spcPts val="500"/>
+              </a:spcAft>
+              <a:defRPr sz="1200">
+                <a:solidFill>
+                  <a:srgbClr val="0F172A"/>
+                </a:solidFill>
+              </a:defRPr>
+            </a:pPr>
+            <a:r>
+              <a:t>Step 3: (b) Persistent without Pipelining: 1 RTT (TCP setup) + 1 RTT (Base HTML) + (8 * 1 RTT) = 10 RTT = 10 * 40 ms = 400 ms.</a:t>
+            </a:r>
+          </a:p>
+          <a:p>
+            <a:pPr>
+              <a:spcAft>
+                <a:spcPts val="500"/>
+              </a:spcAft>
+              <a:defRPr sz="1200">
+                <a:solidFill>
+                  <a:srgbClr val="0F172A"/>
+                </a:solidFill>
+              </a:defRPr>
+            </a:pPr>
+            <a:r>
+              <a:t>Step 4: (c) Persistent with Pipelining: 1 RTT (TCP setup) + 1 RTT (Base HTML) + 1 RTT (pipelined batch) = 3 RTT = 3 * 40 ms = 120 ms.</a:t>
+            </a:r>
+          </a:p>
+          <a:p>
+            <a:pPr>
+              <a:spcAft>
+                <a:spcPts val="800"/>
+              </a:spcAft>
+              <a:defRPr b="1" sz="1300">
+                <a:solidFill>
+                  <a:srgbClr val="047857"/>
+                </a:solidFill>
+              </a:defRPr>
+            </a:pPr>
+            <a:r>
+              <a:t>✅ FINAL ANSWER: Non-Persistent: 720 ms | Persistent: 400 ms | Pipelined: 120 ms</a:t>
+            </a:r>
+          </a:p>
+          <a:p>
+            <a:pPr>
+              <a:defRPr sz="1100">
+                <a:solidFill>
+                  <a:srgbClr val="64748B"/>
+                </a:solidFill>
+              </a:defRPr>
+            </a:pPr>
+            <a:r>
+              <a:t>💡 Exam Tip: Always remember: TCP 3-way handshake consumes 1 full RTT before any HTTP request can be transmitted.</a:t>
+            </a:r>
+          </a:p>
+        </p:txBody>
+      </p:sp>
+      <p:sp>
+        <p:nvSpPr>
+          <p:cNvPr id="10" name="TextBox 9"/>
+          <p:cNvSpPr txBox="1"/>
+          <p:nvPr/>
+        </p:nvSpPr>
+        <p:spPr>
+          <a:xfrm>
+            <a:off x="731520" y="6327648"/>
+            <a:ext cx="10789920" cy="320040"/>
+          </a:xfrm>
+          <a:prstGeom prst="rect">
+            <a:avLst/>
+          </a:prstGeom>
+          <a:noFill/>
+        </p:spPr>
+        <p:txBody>
+          <a:bodyPr wrap="none">
+            <a:spAutoFit/>
+          </a:bodyPr>
+          <a:lstStyle/>
+          <a:p>
+            <a:pPr>
+              <a:defRPr sz="950">
+                <a:solidFill>
+                  <a:srgbClr val="64748B"/>
+                </a:solidFill>
+              </a:defRPr>
+            </a:pPr>
+            <a:r>
+              <a:t>PCCST501 Computer Networks | KTU 2024 Scheme | Prof. Anju Markose | Assistant Professor, Dept. of CSE | VJCET</a:t>
+            </a:r>
+          </a:p>
+        </p:txBody>
+      </p:sp>
+      <p:sp>
+        <p:nvSpPr>
+          <p:cNvPr id="11" name="TextBox 10"/>
+          <p:cNvSpPr txBox="1"/>
+          <p:nvPr/>
+        </p:nvSpPr>
+        <p:spPr>
+          <a:xfrm>
+            <a:off x="6858000" y="6327648"/>
+            <a:ext cx="4572000" cy="320040"/>
+          </a:xfrm>
+          <a:prstGeom prst="rect">
+            <a:avLst/>
+          </a:prstGeom>
+          <a:noFill/>
+        </p:spPr>
+        <p:txBody>
+          <a:bodyPr wrap="none">
+            <a:spAutoFit/>
+          </a:bodyPr>
+          <a:lstStyle/>
+          <a:p>
+            <a:pPr algn="r">
+              <a:defRPr sz="950">
+                <a:solidFill>
+                  <a:srgbClr val="64748B"/>
+                </a:solidFill>
+              </a:defRPr>
+            </a:pPr>
+            <a:r>
+              <a:t>Dept. of CSE, VJCET</a:t>
+            </a:r>
+          </a:p>
+        </p:txBody>
+      </p:sp>
+    </p:spTree>
+  </p:cSld>
+  <p:clrMapOvr>
+    <a:masterClrMapping/>
+  </p:clrMapOvr>
+</p:sld>
+</file>
+
+<file path=ppt/slides/slide5.xml><?xml version="1.0" encoding="utf-8"?>
+<p:sld xmlns:a="http://schemas.openxmlformats.org/drawingml/2006/main" xmlns:p="http://schemas.openxmlformats.org/presentationml/2006/main" xmlns:r="http://schemas.openxmlformats.org/officeDocument/2006/relationships">
+  <p:cSld>
+    <p:spTree>
+      <p:nvGrpSpPr>
+        <p:cNvPr id="1" name=""/>
+        <p:cNvGrpSpPr/>
+        <p:nvPr/>
+      </p:nvGrpSpPr>
+      <p:grpSpPr/>
+      <p:sp>
+        <p:nvSpPr>
+          <p:cNvPr id="2" name="Rectangle 1"/>
+          <p:cNvSpPr/>
+          <p:nvPr/>
+        </p:nvSpPr>
+        <p:spPr>
+          <a:xfrm>
+            <a:off x="0" y="0"/>
+            <a:ext cx="12191695" cy="1005840"/>
+          </a:xfrm>
+          <a:prstGeom prst="rect">
+            <a:avLst/>
+          </a:prstGeom>
+          <a:solidFill>
+            <a:srgbClr val="0F1E4A"/>
+          </a:solidFill>
+          <a:ln>
+            <a:noFill/>
+          </a:ln>
+        </p:spPr>
+        <p:style>
+          <a:lnRef idx="1">
+            <a:schemeClr val="accent1"/>
+          </a:lnRef>
+          <a:fillRef idx="3">
+            <a:schemeClr val="accent1"/>
+          </a:fillRef>
+          <a:effectRef idx="2">
+            <a:schemeClr val="accent1"/>
+          </a:effectRef>
+          <a:fontRef idx="minor">
+            <a:schemeClr val="lt1"/>
+          </a:fontRef>
+        </p:style>
+        <p:txBody>
+          <a:bodyPr rtlCol="0" anchor="ctr"/>
+          <a:lstStyle/>
+          <a:p>
+            <a:pPr algn="ctr"/>
+          </a:p>
+        </p:txBody>
+      </p:sp>
+      <p:sp>
+        <p:nvSpPr>
+          <p:cNvPr id="3" name="Rectangle 2"/>
+          <p:cNvSpPr/>
+          <p:nvPr/>
+        </p:nvSpPr>
+        <p:spPr>
+          <a:xfrm>
+            <a:off x="0" y="969264"/>
+            <a:ext cx="12191695" cy="36576"/>
+          </a:xfrm>
+          <a:prstGeom prst="rect">
+            <a:avLst/>
+          </a:prstGeom>
+          <a:solidFill>
+            <a:srgbClr val="D97706"/>
+          </a:solidFill>
+          <a:ln>
+            <a:noFill/>
+          </a:ln>
+        </p:spPr>
+        <p:style>
+          <a:lnRef idx="1">
+            <a:schemeClr val="accent1"/>
+          </a:lnRef>
+          <a:fillRef idx="3">
+            <a:schemeClr val="accent1"/>
+          </a:fillRef>
+          <a:effectRef idx="2">
+            <a:schemeClr val="accent1"/>
+          </a:effectRef>
+          <a:fontRef idx="minor">
+            <a:schemeClr val="lt1"/>
+          </a:fontRef>
+        </p:style>
+        <p:txBody>
+          <a:bodyPr rtlCol="0" anchor="ctr"/>
+          <a:lstStyle/>
+          <a:p>
+            <a:pPr algn="ctr"/>
+          </a:p>
+        </p:txBody>
+      </p:sp>
+      <p:sp>
+        <p:nvSpPr>
+          <p:cNvPr id="4" name="TextBox 3"/>
+          <p:cNvSpPr txBox="1"/>
+          <p:nvPr/>
+        </p:nvSpPr>
+        <p:spPr>
+          <a:xfrm>
+            <a:off x="731520" y="164592"/>
+            <a:ext cx="8412480" cy="685800"/>
+          </a:xfrm>
+          <a:prstGeom prst="rect">
+            <a:avLst/>
+          </a:prstGeom>
+          <a:noFill/>
+        </p:spPr>
+        <p:txBody>
+          <a:bodyPr wrap="none">
+            <a:spAutoFit/>
+          </a:bodyPr>
+          <a:lstStyle/>
+          <a:p>
+            <a:pPr>
+              <a:defRPr b="1" sz="2100">
+                <a:solidFill>
+                  <a:srgbClr val="F8FAFC"/>
+                </a:solidFill>
+              </a:defRPr>
+            </a:pPr>
+            <a:r>
+              <a:t>🎯 Exam Booster &amp; Review: World Wide Web &amp; HTTP</a:t>
+            </a:r>
+          </a:p>
+        </p:txBody>
+      </p:sp>
+      <p:sp>
+        <p:nvSpPr>
+          <p:cNvPr id="5" name="TextBox 4"/>
+          <p:cNvSpPr txBox="1"/>
+          <p:nvPr/>
+        </p:nvSpPr>
+        <p:spPr>
+          <a:xfrm>
+            <a:off x="8229600" y="164592"/>
+            <a:ext cx="3291840" cy="685800"/>
+          </a:xfrm>
+          <a:prstGeom prst="rect">
+            <a:avLst/>
+          </a:prstGeom>
+          <a:noFill/>
+        </p:spPr>
+        <p:txBody>
+          <a:bodyPr wrap="none">
+            <a:spAutoFit/>
+          </a:bodyPr>
+          <a:lstStyle/>
+          <a:p>
+            <a:pPr algn="r">
+              <a:defRPr b="1" sz="1300">
+                <a:solidFill>
+                  <a:srgbClr val="D97706"/>
+                </a:solidFill>
+              </a:defRPr>
+            </a:pPr>
+            <a:r>
+              <a:t>M1.4</a:t>
+            </a:r>
+          </a:p>
+        </p:txBody>
+      </p:sp>
+      <p:sp>
+        <p:nvSpPr>
+          <p:cNvPr id="6" name="Rounded Rectangle 5"/>
+          <p:cNvSpPr/>
+          <p:nvPr/>
+        </p:nvSpPr>
+        <p:spPr>
+          <a:xfrm>
+            <a:off x="731520" y="1234440"/>
+            <a:ext cx="5303520" cy="4892040"/>
+          </a:xfrm>
+          <a:prstGeom prst="roundRect">
+            <a:avLst/>
+          </a:prstGeom>
+          <a:solidFill>
+            <a:srgbClr val="FEF3C7"/>
+          </a:solidFill>
+          <a:ln w="19050">
+            <a:solidFill>
+              <a:srgbClr val="D97706"/>
+            </a:solidFill>
+          </a:ln>
+        </p:spPr>
+        <p:style>
+          <a:lnRef idx="1">
+            <a:schemeClr val="accent1"/>
+          </a:lnRef>
+          <a:fillRef idx="3">
+            <a:schemeClr val="accent1"/>
+          </a:fillRef>
+          <a:effectRef idx="2">
+            <a:schemeClr val="accent1"/>
+          </a:effectRef>
+          <a:fontRef idx="minor">
+            <a:schemeClr val="lt1"/>
+          </a:fontRef>
+        </p:style>
+        <p:txBody>
+          <a:bodyPr rtlCol="0" anchor="ctr"/>
+          <a:lstStyle/>
+          <a:p>
+            <a:pPr algn="ctr"/>
+          </a:p>
+        </p:txBody>
+      </p:sp>
+      <p:sp>
+        <p:nvSpPr>
+          <p:cNvPr id="7" name="TextBox 6"/>
+          <p:cNvSpPr txBox="1"/>
+          <p:nvPr/>
+        </p:nvSpPr>
+        <p:spPr>
+          <a:xfrm>
+            <a:off x="914400" y="1371600"/>
+            <a:ext cx="4937760" cy="4572000"/>
+          </a:xfrm>
+          <a:prstGeom prst="rect">
+            <a:avLst/>
+          </a:prstGeom>
+          <a:noFill/>
+        </p:spPr>
+        <p:txBody>
+          <a:bodyPr wrap="square">
+            <a:spAutoFit/>
+          </a:bodyPr>
+          <a:lstStyle/>
+          <a:p>
+            <a:pPr>
+              <a:spcAft>
                 <a:spcPts val="1000"/>
               </a:spcAft>
-              <a:defRPr b="1" sz="1500">
+              <a:defRPr b="1" sz="1450">
+                <a:solidFill>
+                  <a:srgbClr val="D97706"/>
+                </a:solidFill>
+              </a:defRPr>
+            </a:pPr>
+            <a:r>
+              <a:t>📚 KTU High-Yield Questions (K3 Apply)</a:t>
+            </a:r>
+          </a:p>
+          <a:p>
+            <a:pPr>
+              <a:spcAft>
+                <a:spcPts val="700"/>
+              </a:spcAft>
+              <a:defRPr sz="1200">
+                <a:solidFill>
+                  <a:srgbClr val="0F172A"/>
+                </a:solidFill>
+              </a:defRPr>
+            </a:pPr>
+            <a:r>
+              <a:t>Q: Explain the difference between non-persistent and persistent HTTP connections with timing diagrams. (7 Marks)</a:t>
+            </a:r>
+          </a:p>
+          <a:p>
+            <a:pPr>
+              <a:spcAft>
+                <a:spcPts val="700"/>
+              </a:spcAft>
+              <a:defRPr sz="1200">
+                <a:solidFill>
+                  <a:srgbClr val="0F172A"/>
+                </a:solidFill>
+              </a:defRPr>
+            </a:pPr>
+            <a:r>
+              <a:t>Q: What is Head-of-Line (HoL) blocking? How do HTTP/2 binary framing and HTTP/3 QUIC solve it? (8 Marks)</a:t>
+            </a:r>
+          </a:p>
+          <a:p>
+            <a:pPr>
+              <a:spcAft>
+                <a:spcPts val="700"/>
+              </a:spcAft>
+              <a:defRPr sz="1200">
+                <a:solidFill>
+                  <a:srgbClr val="0F172A"/>
+                </a:solidFill>
+              </a:defRPr>
+            </a:pPr>
+            <a:r>
+              <a:t>Q: Describe the mechanism of Web Caching using the Conditional GET request (`If-Modified-Since`). (5 Marks)</a:t>
+            </a:r>
+          </a:p>
+        </p:txBody>
+      </p:sp>
+      <p:sp>
+        <p:nvSpPr>
+          <p:cNvPr id="8" name="Rounded Rectangle 7"/>
+          <p:cNvSpPr/>
+          <p:nvPr/>
+        </p:nvSpPr>
+        <p:spPr>
+          <a:xfrm>
+            <a:off x="6309360" y="1234440"/>
+            <a:ext cx="5212080" cy="4892040"/>
+          </a:xfrm>
+          <a:prstGeom prst="roundRect">
+            <a:avLst/>
+          </a:prstGeom>
+          <a:solidFill>
+            <a:srgbClr val="EEF2FF"/>
+          </a:solidFill>
+          <a:ln w="19050">
+            <a:solidFill>
+              <a:srgbClr val="0E7490"/>
+            </a:solidFill>
+          </a:ln>
+        </p:spPr>
+        <p:style>
+          <a:lnRef idx="1">
+            <a:schemeClr val="accent1"/>
+          </a:lnRef>
+          <a:fillRef idx="3">
+            <a:schemeClr val="accent1"/>
+          </a:fillRef>
+          <a:effectRef idx="2">
+            <a:schemeClr val="accent1"/>
+          </a:effectRef>
+          <a:fontRef idx="minor">
+            <a:schemeClr val="lt1"/>
+          </a:fontRef>
+        </p:style>
+        <p:txBody>
+          <a:bodyPr rtlCol="0" anchor="ctr"/>
+          <a:lstStyle/>
+          <a:p>
+            <a:pPr algn="ctr"/>
+          </a:p>
+        </p:txBody>
+      </p:sp>
+      <p:sp>
+        <p:nvSpPr>
+          <p:cNvPr id="9" name="TextBox 8"/>
+          <p:cNvSpPr txBox="1"/>
+          <p:nvPr/>
+        </p:nvSpPr>
+        <p:spPr>
+          <a:xfrm>
+            <a:off x="6492240" y="1371600"/>
+            <a:ext cx="4846320" cy="4572000"/>
+          </a:xfrm>
+          <a:prstGeom prst="rect">
+            <a:avLst/>
+          </a:prstGeom>
+          <a:noFill/>
+        </p:spPr>
+        <p:txBody>
+          <a:bodyPr wrap="square">
+            <a:spAutoFit/>
+          </a:bodyPr>
+          <a:lstStyle/>
+          <a:p>
+            <a:pPr>
+              <a:spcAft>
+                <a:spcPts val="1000"/>
+              </a:spcAft>
+              <a:defRPr b="1" sz="1450">
                 <a:solidFill>
                   <a:srgbClr val="0E7490"/>
                 </a:solidFill>
               </a:defRPr>
             </a:pPr>
             <a:r>
-              <a:t>HTTP Evolution Summary</a:t>
+              <a:t>💡 Critical Conceptual Takeaways</a:t>
             </a:r>
           </a:p>
           <a:p>
@@ -4784,12 +5603,12 @@
               </a:spcAft>
               <a:defRPr sz="1200">
                 <a:solidFill>
-                  <a:srgbClr val="1E293B"/>
-                </a:solidFill>
-              </a:defRPr>
-            </a:pPr>
-            <a:r>
-              <a:t>→ HTTP/1.0: 1 Object per TCP</a:t>
+                  <a:srgbClr val="0F172A"/>
+                </a:solidFill>
+              </a:defRPr>
+            </a:pPr>
+            <a:r>
+              <a:t>✔ HTTP/1.0 incurs 2 RTT per object; HTTP/1.1 persistent reuses TCP connections to save handshakes.</a:t>
             </a:r>
           </a:p>
           <a:p>
@@ -4799,12 +5618,12 @@
               </a:spcAft>
               <a:defRPr sz="1200">
                 <a:solidFill>
-                  <a:srgbClr val="1E293B"/>
-                </a:solidFill>
-              </a:defRPr>
-            </a:pPr>
-            <a:r>
-              <a:t>→ HTTP/1.1: Persistent + Keep-Alive</a:t>
+                  <a:srgbClr val="0F172A"/>
+                </a:solidFill>
+              </a:defRPr>
+            </a:pPr>
+            <a:r>
+              <a:t>✔ HTTP/2 multiplexes streams over 1 TCP connection using binary framing, but TCP packet loss stalls all streams.</a:t>
             </a:r>
           </a:p>
           <a:p>
@@ -4814,12 +5633,12 @@
               </a:spcAft>
               <a:defRPr sz="1200">
                 <a:solidFill>
-                  <a:srgbClr val="1E293B"/>
-                </a:solidFill>
-              </a:defRPr>
-            </a:pPr>
-            <a:r>
-              <a:t>→ HTTP/2: Binary Multiplexing + Push</a:t>
+                  <a:srgbClr val="0F172A"/>
+                </a:solidFill>
+              </a:defRPr>
+            </a:pPr>
+            <a:r>
+              <a:t>✔ HTTP/3 runs over UDP with QUIC to provide independent stream streams and 0-RTT connection re-establishment.</a:t>
             </a:r>
           </a:p>
           <a:p>
@@ -4829,41 +5648,26 @@
               </a:spcAft>
               <a:defRPr sz="1200">
                 <a:solidFill>
-                  <a:srgbClr val="1E293B"/>
-                </a:solidFill>
-              </a:defRPr>
-            </a:pPr>
-            <a:r>
-              <a:t>→ HTTP/3: UDP (QUIC) + 0-RTT TLS</a:t>
-            </a:r>
-          </a:p>
-          <a:p>
-            <a:pPr>
-              <a:spcAft>
-                <a:spcPts val="600"/>
-              </a:spcAft>
-              <a:defRPr sz="1200">
-                <a:solidFill>
-                  <a:srgbClr val="1E293B"/>
-                </a:solidFill>
-              </a:defRPr>
-            </a:pPr>
-            <a:r>
-              <a:t>→ Web Caching: Reduces ISP load</a:t>
-            </a:r>
-          </a:p>
-        </p:txBody>
-      </p:sp>
-      <p:sp>
-        <p:nvSpPr>
-          <p:cNvPr id="9" name="TextBox 8"/>
+                  <a:srgbClr val="0F172A"/>
+                </a:solidFill>
+              </a:defRPr>
+            </a:pPr>
+            <a:r>
+              <a:t>✔ Web caches reduce traffic intensity on access links and drastically cut down end-user latency.</a:t>
+            </a:r>
+          </a:p>
+        </p:txBody>
+      </p:sp>
+      <p:sp>
+        <p:nvSpPr>
+          <p:cNvPr id="10" name="TextBox 9"/>
           <p:cNvSpPr txBox="1"/>
           <p:nvPr/>
         </p:nvSpPr>
         <p:spPr>
           <a:xfrm>
-            <a:off x="731520" y="6309360"/>
-            <a:ext cx="10789920" cy="365760"/>
+            <a:off x="731520" y="6327648"/>
+            <a:ext cx="10789920" cy="320040"/>
           </a:xfrm>
           <a:prstGeom prst="rect">
             <a:avLst/>
@@ -4885,6 +5689,41 @@
             </a:pPr>
             <a:r>
               <a:t>PCCST501 Computer Networks | KTU 2024 Scheme | Prof. Anju Markose | Assistant Professor, Dept. of CSE | VJCET</a:t>
+            </a:r>
+          </a:p>
+        </p:txBody>
+      </p:sp>
+      <p:sp>
+        <p:nvSpPr>
+          <p:cNvPr id="11" name="TextBox 10"/>
+          <p:cNvSpPr txBox="1"/>
+          <p:nvPr/>
+        </p:nvSpPr>
+        <p:spPr>
+          <a:xfrm>
+            <a:off x="6858000" y="6327648"/>
+            <a:ext cx="4572000" cy="320040"/>
+          </a:xfrm>
+          <a:prstGeom prst="rect">
+            <a:avLst/>
+          </a:prstGeom>
+          <a:noFill/>
+        </p:spPr>
+        <p:txBody>
+          <a:bodyPr wrap="none">
+            <a:spAutoFit/>
+          </a:bodyPr>
+          <a:lstStyle/>
+          <a:p>
+            <a:pPr algn="r">
+              <a:defRPr sz="950">
+                <a:solidFill>
+                  <a:srgbClr val="64748B"/>
+                </a:solidFill>
+              </a:defRPr>
+            </a:pPr>
+            <a:r>
+              <a:t>Dept. of CSE, VJCET</a:t>
             </a:r>
           </a:p>
         </p:txBody>
